--- a/tig-final/Lumine_TIG_Final_Control_de_Gestion.pptx
+++ b/tig-final/Lumine_TIG_Final_Control_de_Gestion.pptx
@@ -166,7 +166,7 @@
   <p:extLst>
     <p:ext uri="{521415D9-36F7-43E2-AB2F-B90AF26B5E84}">
       <p14:sectionLst xmlns:p14="http://schemas.microsoft.com/office/powerpoint/2010/main">
-        <p14:section name="1 · Diego Alarcón" id="{e7a9679f-da1a-58a5-34d2-85c272060eac}">
+        <p14:section name="1 · Diego Alarcón" id="{ea58ca10-fc1e-fec9-260d-6a20f04e14dc}">
           <p14:sldIdLst>
             <p14:sldId id="256"/>
             <p14:sldId id="257"/>
@@ -175,7 +175,7 @@
             <p14:sldId id="260"/>
           </p14:sldIdLst>
         </p14:section>
-        <p14:section name="2 · Benjamín Torres" id="{a22484f5-3bd3-36ad-0d24-7fe5f25c8b63}">
+        <p14:section name="2 · Benjamín Torres" id="{569e9867-de46-22c1-db5f-6e6837a89d74}">
           <p14:sldIdLst>
             <p14:sldId id="261"/>
             <p14:sldId id="262"/>
@@ -183,7 +183,7 @@
             <p14:sldId id="264"/>
           </p14:sldIdLst>
         </p14:section>
-        <p14:section name="3 · Lukas Verdugo" id="{814d4070-c105-722a-28fb-4bed5c3540f3}">
+        <p14:section name="3 · Lukas Verdugo" id="{1c488548-e8a1-c19f-f342-cf917c491c62}">
           <p14:sldIdLst>
             <p14:sldId id="265"/>
             <p14:sldId id="266"/>
@@ -192,12 +192,12 @@
             <p14:sldId id="269"/>
           </p14:sldIdLst>
         </p14:section>
-        <p14:section name="4 · Diego Alarcón" id="{31ffce8a-1d88-d152-b2b9-4609be434b6f}">
+        <p14:section name="4 · Diego Alarcón" id="{d6b84676-bccf-113e-1127-74716f6ae375}">
           <p14:sldIdLst>
             <p14:sldId id="270"/>
           </p14:sldIdLst>
         </p14:section>
-        <p14:section name="Anexo" id="{416876f9-bd53-586a-6388-0146611fa1da}">
+        <p14:section name="Anexo" id="{91622614-d215-5a75-6169-f2022f13530c}">
           <p14:sldIdLst>
             <p14:sldId id="271"/>
             <p14:sldId id="272"/>
@@ -1288,8 +1288,8 @@
           <a:p>
             <a:r>
               <a:rPr lang="en-US" dirty="0"/>
-              <a:t>LUKAS VERDUGO · 0:40 a 130 palabras por minuto (91 palabras) · Informe: 10.3 Escenarios regulatorios en el CMI
-El tercer hallazgo es la vía legal. Actúa sobre el mapa por dos relaciones externas: condiciona la aprobación de cada modelo y la réplica en otros talleres. Si el reglamento abre una vía amplia, se avanza modelo por modelo. Si es acotada, se ajusta la meta de captación al parque elegible. Si es alternativa, cambia el indicador de la vía legal y se recalendarizan los hitos. Y si no hay vía, se detiene todo lo que depende de ella y no se suben metas comerciales. Hoy estamos entre los dos últimos.</a:t>
+              <a:t>LUKAS VERDUGO · 0:45 a 130 palabras por minuto (96 palabras) · Informe: 10.3 Escenarios regulatorios en el CMI
+El tercer hallazgo es la vía legal. Actúa sobre el mapa por dos relaciones externas: condiciona la aprobación de cada modelo y la réplica en otros talleres. Si el reglamento abre una vía amplia, se avanza modelo por modelo. Si es acotada, se ajusta la meta de captación al parque elegible. Si es alternativa, cambia el indicador de la vía legal y se recalendarizan los hitos. Y si no hay vía, se detiene todo lo que depende de ella y no se suben metas comerciales. Si el reglamento sigue al borrador, estaríamos entre los dos últimos.</a:t>
             </a:r>
             <a:endParaRPr lang="en-US" dirty="0"/>
           </a:p>
@@ -2890,7 +2890,7 @@
             <a:r>
               <a:rPr lang="en-US" dirty="0"/>
               <a:t>ANEXO A7 · Solo si preguntan.
-Seis factores; dos son condiciones de entrada.</a:t>
+Seis factores; la gestión regulatoria es condición de entrada.</a:t>
             </a:r>
             <a:endParaRPr lang="en-US" dirty="0"/>
           </a:p>
@@ -2978,8 +2978,8 @@
           <a:p>
             <a:r>
               <a:rPr lang="en-US" dirty="0"/>
-              <a:t>DIEGO ALARCÓN · 0:35 a 130 palabras por minuto (77 palabras) · Informe: 4. Comprensión del negocio
-Lumine instalaría un kit de hibridación aditiva en autos a combustión de tracción delantera. El motor original queda intacto. El kit suma una unidad de control, que decide cuándo asistir y corta ante fallas; un banco de baterías, que guarda la energía del frenado, y un motor eléctrico en el eje trasero. No se enchufa, y el freno, el ABS y el control de estabilidad originales siempre mandan. Hoy es un diseño: falta probarlo, homologarlo y documentarlo.</a:t>
+              <a:t>DIEGO ALARCÓN · 0:35 a 130 palabras por minuto (81 palabras) · Informe: 4. Comprensión del negocio
+Lumine instalaría un kit de hibridación aditiva en autos a combustión de tracción delantera. El motor original queda intacto. El kit suma una unidad de control, que decide cuándo asistir y corta ante fallas; un banco de baterías, que guarda la energía del frenado, y un motor eléctrico en el eje trasero. No se enchufa, y el diseño deja que el freno, el ABS y el control de estabilidad originales siempre manden. Hoy es un diseño: falta probarlo, homologarlo y documentarlo.</a:t>
             </a:r>
             <a:endParaRPr lang="en-US" dirty="0"/>
           </a:p>
@@ -3690,8 +3690,8 @@
           <a:p>
             <a:r>
               <a:rPr lang="en-US" dirty="0"/>
-              <a:t>BENJAMÍN TORRES · 1:10 a 130 palabras por minuto (150 palabras) · Informe: 6.1 a 6.3 Análisis estratégico
-Gracias, Diego. El diagnóstico se resume en cuatro números. Primero, el entorno general: la matriz PEST da dos coma ochenta y dos sobre cinco, bajo el neutro de tres; el freno es económico, por el desempleo de nueve coma seis por ciento y un dólar sobre novecientos setenta pesos con un kit importado, y también regulatorio. Segundo, la industria: las cinco fuerzas dan tres coma cuarenta y nueve, una industria poco atractiva, y el rival principal no es otro taller: es que el cliente posponga la inversión. Tercero, hacia adentro: de quince recursos y capacidades, solo dos son potencialmente sostenibles, la biblioteca de calibraciones y la ingeniería de integración, y la biblioteca hoy está vacía. Cuarto, la Ley veintiún mil setecientos noventa y tres no tiene reglamento; con el borrador de dos mil veintiuno estamos entre la vía alternativa y ninguna. Eso no se promedia: es una condición de entrada.</a:t>
+              <a:t>BENJAMÍN TORRES · 1:10 a 130 palabras por minuto (153 palabras) · Informe: 6.1 a 6.3 Análisis estratégico
+Gracias, Diego. El diagnóstico se resume en cuatro números. Primero, el entorno general: la matriz PEST da dos coma ochenta y dos sobre cinco, bajo el neutro de tres; el freno es económico, por el desempleo de nueve coma seis por ciento y un dólar sobre novecientos setenta pesos con un kit importado, y también regulatorio. Segundo, la industria: las cinco fuerzas dan tres coma cuarenta y nueve, una industria poco atractiva, y el rival principal no es otro taller: es que el cliente posponga la inversión. Tercero, hacia adentro: de quince recursos y capacidades, solo dos son potencialmente sostenibles, la biblioteca de calibraciones y la ingeniería de integración, y la biblioteca hoy está vacía. Cuarto, la Ley veintiún mil setecientos noventa y tres no tiene reglamento; si el reglamento sigue al borrador de dos mil veintiuno, quedaríamos entre la vía alternativa y ninguna. Eso no se promedia: es una condición de entrada.</a:t>
             </a:r>
             <a:endParaRPr lang="en-US" dirty="0"/>
           </a:p>
@@ -11858,7 +11858,7 @@
                 <a:ea typeface="IBM Plex Mono" pitchFamily="34" charset="-122"/>
                 <a:cs typeface="IBM Plex Mono" pitchFamily="34" charset="-120"/>
               </a:rPr>
-              <a:t>HOY · BORRADOR DE 2021</a:t>
+              <a:t>SI SIGUE EL BORRADOR</a:t>
             </a:r>
             <a:endParaRPr lang="es-CL" sz="1300" dirty="0"/>
           </a:p>
@@ -37178,7 +37178,7 @@
                 <a:ea typeface="Figtree" pitchFamily="34" charset="-122"/>
                 <a:cs typeface="Figtree" pitchFamily="34" charset="-120"/>
               </a:rPr>
-              <a:t>Bencina más cara; baterías LFP a US$81/kWh</a:t>
+              <a:t>Bencina más cara; packs LFP a US$81/kWh (promedio mundial)</a:t>
             </a:r>
             <a:endParaRPr lang="es-CL" sz="1400" dirty="0"/>
           </a:p>
@@ -37453,7 +37453,7 @@
                 <a:ea typeface="Figtree" pitchFamily="34" charset="-122"/>
                 <a:cs typeface="Figtree" pitchFamily="34" charset="-120"/>
               </a:rPr>
-              <a:t>Aseguradoras excluyen vehículos modificados; pago por sostenibilidad sesgado por ingreso</a:t>
+              <a:t>Posibles exclusiones de modificados en seguros (por verificar); pago por sostenibilidad sesgado por ingreso</a:t>
             </a:r>
             <a:endParaRPr lang="es-CL" sz="1400" dirty="0"/>
           </a:p>
@@ -39592,7 +39592,7 @@
                 <a:ea typeface="Figtree" pitchFamily="34" charset="-122"/>
                 <a:cs typeface="Figtree" pitchFamily="34" charset="-120"/>
               </a:rPr>
-              <a:t>Nadie ofrece hoy el servicio</a:t>
+              <a:t>Sin competidores directos identificados</a:t>
             </a:r>
             <a:endParaRPr lang="es-CL" sz="1600" dirty="0"/>
           </a:p>
@@ -41876,7 +41876,7 @@
                 <a:ea typeface="Instrument Serif" pitchFamily="34" charset="-122"/>
                 <a:cs typeface="Instrument Serif" pitchFamily="34" charset="-120"/>
               </a:rPr>
-              <a:t>dos son condición de entrada.</a:t>
+              <a:t>uno es condición de entrada.</a:t>
             </a:r>
             <a:endParaRPr lang="en-US" sz="3400" dirty="0"/>
           </a:p>
@@ -42453,7 +42453,7 @@
                 <a:ea typeface="Figtree" pitchFamily="34" charset="-122"/>
                 <a:cs typeface="Figtree" pitchFamily="34" charset="-120"/>
               </a:rPr>
-              <a:t>Sin convenio · condición de entrada</a:t>
+              <a:t>Sin convenio · facilitador clave de la compra</a:t>
             </a:r>
             <a:endParaRPr lang="es-CL" sz="1500" dirty="0"/>
           </a:p>
@@ -44170,7 +44170,7 @@
               <a:buNone/>
             </a:pPr>
             <a:r>
-              <a:rPr lang="es-CL" altLang="en-US" sz="1700" dirty="0">
+              <a:rPr lang="es-CL" altLang="en-US" sz="1600" dirty="0">
                 <a:solidFill>
                   <a:schemeClr val="tx1"/>
                 </a:solidFill>
@@ -44180,7 +44180,7 @@
               </a:rPr>
               <a:t>Preoperativa: sin taller, personal ni clientes</a:t>
             </a:r>
-            <a:endParaRPr lang="es-CL" sz="1700" dirty="0"/>
+            <a:endParaRPr lang="es-CL" sz="1600" dirty="0"/>
           </a:p>
         </p:txBody>
       </p:sp>
@@ -44271,7 +44271,7 @@
               <a:buNone/>
             </a:pPr>
             <a:r>
-              <a:rPr lang="es-CL" altLang="en-US" sz="1700" dirty="0">
+              <a:rPr lang="es-CL" altLang="en-US" sz="1600" dirty="0">
                 <a:solidFill>
                   <a:schemeClr val="tx1"/>
                 </a:solidFill>
@@ -44279,9 +44279,9 @@
                 <a:ea typeface="Figtree" pitchFamily="34" charset="-122"/>
                 <a:cs typeface="Figtree" pitchFamily="34" charset="-120"/>
               </a:rPr>
-              <a:t>Freno, ABS y control de estabilidad originales mandan sobre el kit</a:t>
-            </a:r>
-            <a:endParaRPr lang="es-CL" sz="1700" dirty="0"/>
+              <a:t>Por diseño, freno, ABS y estabilidad originales mandan sobre el kit</a:t>
+            </a:r>
+            <a:endParaRPr lang="es-CL" sz="1600" dirty="0"/>
           </a:p>
         </p:txBody>
       </p:sp>
@@ -44372,7 +44372,7 @@
               <a:buNone/>
             </a:pPr>
             <a:r>
-              <a:rPr lang="es-CL" altLang="en-US" sz="1700" dirty="0">
+              <a:rPr lang="es-CL" altLang="en-US" sz="1600" dirty="0">
                 <a:solidFill>
                   <a:schemeClr val="tx1"/>
                 </a:solidFill>
@@ -44382,7 +44382,7 @@
               </a:rPr>
               <a:t>Falta probarlo, homologarlo y documentarlo</a:t>
             </a:r>
-            <a:endParaRPr lang="es-CL" sz="1700" dirty="0"/>
+            <a:endParaRPr lang="es-CL" sz="1600" dirty="0"/>
           </a:p>
         </p:txBody>
       </p:sp>
@@ -45646,7 +45646,7 @@
                 <a:ea typeface="Figtree" pitchFamily="34" charset="-122"/>
                 <a:cs typeface="Figtree" pitchFamily="34" charset="-120"/>
               </a:rPr>
-              <a:t>Técnicos escasos y sin esquema de retención</a:t>
+              <a:t>Sin técnicos habilitados ni esquema de retención</a:t>
             </a:r>
             <a:endParaRPr lang="es-CL" sz="1400" dirty="0"/>
           </a:p>
@@ -45667,7 +45667,7 @@
                 <a:ea typeface="Figtree" pitchFamily="34" charset="-122"/>
                 <a:cs typeface="Figtree" pitchFamily="34" charset="-120"/>
               </a:rPr>
-              <a:t>Patrimonio reducido; inventario en dólares sin cobertura</a:t>
+              <a:t>Patrimonio reducido; compras en dólares sin cobertura</a:t>
             </a:r>
             <a:endParaRPr lang="es-CL" sz="1400" dirty="0"/>
           </a:p>
@@ -45837,7 +45837,7 @@
                 <a:ea typeface="Figtree" pitchFamily="34" charset="-122"/>
                 <a:cs typeface="Figtree" pitchFamily="34" charset="-120"/>
               </a:rPr>
-              <a:t>Baterías LFP a US$81/kWh (BloombergNEF, 2025)</a:t>
+              <a:t>Packs LFP a US$81/kWh, promedio mundial (BloombergNEF, 2025)</a:t>
             </a:r>
             <a:endParaRPr lang="es-CL" sz="1400" dirty="0"/>
           </a:p>
@@ -46028,7 +46028,7 @@
                 <a:ea typeface="Figtree" pitchFamily="34" charset="-122"/>
                 <a:cs typeface="Figtree" pitchFamily="34" charset="-120"/>
               </a:rPr>
-              <a:t>Posponer la inversión; aseguradoras excluyen modificados</a:t>
+              <a:t>Posponer la inversión; posibles exclusiones de seguros</a:t>
             </a:r>
             <a:endParaRPr lang="es-CL" sz="1400" dirty="0"/>
           </a:p>
@@ -48115,7 +48115,7 @@
                 <a:ea typeface="Figtree" pitchFamily="34" charset="-122"/>
                 <a:cs typeface="Figtree" pitchFamily="34" charset="-120"/>
               </a:rPr>
-              <a:t>VRIO 2 de 15 y FCE</a:t>
+              <a:t>Recursos: 2 de 15; FCE</a:t>
             </a:r>
             <a:endParaRPr lang="es-CL" sz="1600" dirty="0"/>
           </a:p>
@@ -51866,7 +51866,7 @@
                 <a:ea typeface="IBM Plex Mono" pitchFamily="34" charset="-122"/>
                 <a:cs typeface="IBM Plex Mono" pitchFamily="34" charset="-120"/>
               </a:rPr>
-              <a:t>RECURSOS · VRIO</a:t>
+              <a:t>RECURSOS · 4 CRITERIOS</a:t>
             </a:r>
             <a:endParaRPr lang="es-CL" sz="1300" dirty="0"/>
           </a:p>
@@ -52356,7 +52356,7 @@
                 <a:ea typeface="Figtree" pitchFamily="34" charset="-122"/>
                 <a:cs typeface="Figtree" pitchFamily="34" charset="-120"/>
               </a:rPr>
-              <a:t>con el borrador de 2021</a:t>
+              <a:t>si sigue el borrador de 2021</a:t>
             </a:r>
             <a:endParaRPr lang="es-CL" sz="1500" dirty="0"/>
           </a:p>
@@ -53779,7 +53779,7 @@
                 <a:ea typeface="IBM Plex Mono" pitchFamily="34" charset="-122"/>
                 <a:cs typeface="IBM Plex Mono" pitchFamily="34" charset="-120"/>
               </a:rPr>
-              <a:t>VIENE DE · VRIO · FCE · CADENA</a:t>
+              <a:t>VIENE DE · RECURSOS · FCE · CADENA</a:t>
             </a:r>
             <a:endParaRPr lang="es-CL" sz="1100" dirty="0"/>
           </a:p>
